--- a/康健图谱_演示PPT.pptx
+++ b/康健图谱_演示PPT.pptx
@@ -15163,8 +15163,15 @@
               </a:defRPr>
             </a:pPr>
             <a:r>
+              <a:rPr lang="zh-CN" altLang="en-US" dirty="0">
+                <a:latin typeface="微软雅黑" panose="020B0503020204020204" pitchFamily="34" charset="-122"/>
+                <a:ea typeface="微软雅黑" panose="020B0503020204020204" pitchFamily="34" charset="-122"/>
+              </a:rPr>
+              <a:t>评分</a:t>
+            </a:r>
+            <a:r>
               <a:rPr dirty="0" err="1"/>
-              <a:t>纠正算法（规则+ONNX推理</a:t>
+              <a:t>算法（规则+ONNX推理</a:t>
             </a:r>
             <a:r>
               <a:rPr dirty="0"/>
@@ -16786,7 +16793,7 @@
         </p:nvSpPr>
         <p:spPr>
           <a:xfrm>
-            <a:off x="4754880" y="2825161"/>
+            <a:off x="4754880" y="3332653"/>
             <a:ext cx="2743200" cy="411480"/>
           </a:xfrm>
           <a:prstGeom prst="rect">
@@ -16836,7 +16843,7 @@
         </p:nvSpPr>
         <p:spPr>
           <a:xfrm>
-            <a:off x="4724247" y="3285399"/>
+            <a:off x="4724247" y="3835573"/>
             <a:ext cx="2743200" cy="411480"/>
           </a:xfrm>
           <a:prstGeom prst="rect">
@@ -17083,6 +17090,58 @@
             <a:r>
               <a:t>→ 上线前安全审计</a:t>
             </a:r>
+          </a:p>
+        </p:txBody>
+      </p:sp>
+      <p:sp>
+        <p:nvSpPr>
+          <p:cNvPr id="26" name="TextBox 15">
+            <a:extLst>
+              <a:ext uri="{FF2B5EF4-FFF2-40B4-BE49-F238E27FC236}">
+                <a16:creationId xmlns:a16="http://schemas.microsoft.com/office/drawing/2014/main" id="{1A31FDBB-8368-4B9C-B376-702DEE16C3EA}"/>
+              </a:ext>
+            </a:extLst>
+          </p:cNvPr>
+          <p:cNvSpPr txBox="1"/>
+          <p:nvPr/>
+        </p:nvSpPr>
+        <p:spPr>
+          <a:xfrm>
+            <a:off x="4754880" y="2829733"/>
+            <a:ext cx="2743200" cy="411480"/>
+          </a:xfrm>
+          <a:prstGeom prst="rect">
+            <a:avLst/>
+          </a:prstGeom>
+          <a:noFill/>
+        </p:spPr>
+        <p:txBody>
+          <a:bodyPr wrap="square"/>
+          <a:lstStyle/>
+          <a:p>
+            <a:pPr algn="l">
+              <a:defRPr sz="1200" b="0">
+                <a:solidFill>
+                  <a:srgbClr val="636E72"/>
+                </a:solidFill>
+                <a:latin typeface="Microsoft YaHei"/>
+              </a:defRPr>
+            </a:pPr>
+            <a:r>
+              <a:rPr dirty="0"/>
+              <a:t>→ </a:t>
+            </a:r>
+            <a:r>
+              <a:rPr lang="zh-CN" altLang="en-US" dirty="0">
+                <a:latin typeface="微软雅黑" panose="020B0503020204020204" pitchFamily="34" charset="-122"/>
+                <a:ea typeface="微软雅黑" panose="020B0503020204020204" pitchFamily="34" charset="-122"/>
+              </a:rPr>
+              <a:t>持续优化动作评分算法</a:t>
+            </a:r>
+            <a:endParaRPr dirty="0">
+              <a:latin typeface="微软雅黑" panose="020B0503020204020204" pitchFamily="34" charset="-122"/>
+              <a:ea typeface="微软雅黑" panose="020B0503020204020204" pitchFamily="34" charset="-122"/>
+            </a:endParaRPr>
           </a:p>
         </p:txBody>
       </p:sp>
